--- a/Fall 2026/Week 4 -- Genome Sequencing and Assembly Algorithms.pptx
+++ b/Fall 2026/Week 4 -- Genome Sequencing and Assembly Algorithms.pptx
@@ -157,31 +157,78 @@
 <pc:chgInfo xmlns:a="http://schemas.openxmlformats.org/drawingml/2006/main" xmlns:r="http://schemas.openxmlformats.org/officeDocument/2006/relationships" xmlns:ac="http://schemas.microsoft.com/office/drawing/2013/main/command" xmlns:pc="http://schemas.microsoft.com/office/powerpoint/2013/main/command">
   <pc:docChgLst>
     <pc:chgData name="Aleksey Zimin" userId="7f2637d0bc515791" providerId="LiveId" clId="{5F359FD6-B8E9-41DA-90EC-0BA4FD0F3073}"/>
-    <pc:docChg chg="delSld modSld">
-      <pc:chgData name="Aleksey Zimin" userId="7f2637d0bc515791" providerId="LiveId" clId="{5F359FD6-B8E9-41DA-90EC-0BA4FD0F3073}" dt="2026-09-21T17:12:38.857" v="2" actId="47"/>
+    <pc:docChg chg="undo custSel delSld modSld">
+      <pc:chgData name="Aleksey Zimin" userId="7f2637d0bc515791" providerId="LiveId" clId="{5F359FD6-B8E9-41DA-90EC-0BA4FD0F3073}" dt="2026-09-23T17:48:41.935" v="34" actId="20577"/>
       <pc:docMkLst>
         <pc:docMk/>
       </pc:docMkLst>
-      <pc:sldChg chg="mod modShow">
-        <pc:chgData name="Aleksey Zimin" userId="7f2637d0bc515791" providerId="LiveId" clId="{5F359FD6-B8E9-41DA-90EC-0BA4FD0F3073}" dt="2026-09-21T17:12:28.884" v="0" actId="34476"/>
+      <pc:sldChg chg="modSp mod">
+        <pc:chgData name="Aleksey Zimin" userId="7f2637d0bc515791" providerId="LiveId" clId="{5F359FD6-B8E9-41DA-90EC-0BA4FD0F3073}" dt="2026-09-23T17:41:37.474" v="3" actId="20577"/>
+        <pc:sldMkLst>
+          <pc:docMk/>
+          <pc:sldMk cId="3138998660" sldId="457"/>
+        </pc:sldMkLst>
+        <pc:spChg chg="mod">
+          <ac:chgData name="Aleksey Zimin" userId="7f2637d0bc515791" providerId="LiveId" clId="{5F359FD6-B8E9-41DA-90EC-0BA4FD0F3073}" dt="2026-09-23T17:41:37.474" v="3" actId="20577"/>
+          <ac:spMkLst>
+            <pc:docMk/>
+            <pc:sldMk cId="3138998660" sldId="457"/>
+            <ac:spMk id="15" creationId="{7BF44020-C76E-A795-19C0-F96D9A1CA532}"/>
+          </ac:spMkLst>
+        </pc:spChg>
+      </pc:sldChg>
+      <pc:sldChg chg="modSp mod modShow">
+        <pc:chgData name="Aleksey Zimin" userId="7f2637d0bc515791" providerId="LiveId" clId="{5F359FD6-B8E9-41DA-90EC-0BA4FD0F3073}" dt="2026-09-23T17:46:24.498" v="7" actId="14100"/>
         <pc:sldMkLst>
           <pc:docMk/>
           <pc:sldMk cId="3771281687" sldId="462"/>
         </pc:sldMkLst>
+        <pc:picChg chg="mod">
+          <ac:chgData name="Aleksey Zimin" userId="7f2637d0bc515791" providerId="LiveId" clId="{5F359FD6-B8E9-41DA-90EC-0BA4FD0F3073}" dt="2026-09-23T17:46:24.498" v="7" actId="14100"/>
+          <ac:picMkLst>
+            <pc:docMk/>
+            <pc:sldMk cId="3771281687" sldId="462"/>
+            <ac:picMk id="8" creationId="{58EFE816-D97E-B7E7-BB46-3E2307D3D922}"/>
+          </ac:picMkLst>
+        </pc:picChg>
       </pc:sldChg>
-      <pc:sldChg chg="del">
-        <pc:chgData name="Aleksey Zimin" userId="7f2637d0bc515791" providerId="LiveId" clId="{5F359FD6-B8E9-41DA-90EC-0BA4FD0F3073}" dt="2026-09-21T17:12:36.916" v="1" actId="47"/>
+      <pc:sldChg chg="modSp mod">
+        <pc:chgData name="Aleksey Zimin" userId="7f2637d0bc515791" providerId="LiveId" clId="{5F359FD6-B8E9-41DA-90EC-0BA4FD0F3073}" dt="2026-09-23T17:42:22.280" v="5" actId="20577"/>
         <pc:sldMkLst>
           <pc:docMk/>
-          <pc:sldMk cId="3890613836" sldId="465"/>
+          <pc:sldMk cId="2889233369" sldId="489"/>
         </pc:sldMkLst>
+        <pc:spChg chg="mod">
+          <ac:chgData name="Aleksey Zimin" userId="7f2637d0bc515791" providerId="LiveId" clId="{5F359FD6-B8E9-41DA-90EC-0BA4FD0F3073}" dt="2026-09-23T17:42:22.280" v="5" actId="20577"/>
+          <ac:spMkLst>
+            <pc:docMk/>
+            <pc:sldMk cId="2889233369" sldId="489"/>
+            <ac:spMk id="3" creationId="{8E026558-B08D-BBAD-90D8-7AAE44FDB0AC}"/>
+          </ac:spMkLst>
+        </pc:spChg>
+        <pc:spChg chg="mod">
+          <ac:chgData name="Aleksey Zimin" userId="7f2637d0bc515791" providerId="LiveId" clId="{5F359FD6-B8E9-41DA-90EC-0BA4FD0F3073}" dt="2026-09-23T17:42:03.493" v="4" actId="20577"/>
+          <ac:spMkLst>
+            <pc:docMk/>
+            <pc:sldMk cId="2889233369" sldId="489"/>
+            <ac:spMk id="15" creationId="{6587E0AB-5067-A345-C2ED-245774E7F188}"/>
+          </ac:spMkLst>
+        </pc:spChg>
       </pc:sldChg>
-      <pc:sldChg chg="del">
-        <pc:chgData name="Aleksey Zimin" userId="7f2637d0bc515791" providerId="LiveId" clId="{5F359FD6-B8E9-41DA-90EC-0BA4FD0F3073}" dt="2026-09-21T17:12:38.857" v="2" actId="47"/>
+      <pc:sldChg chg="modSp mod">
+        <pc:chgData name="Aleksey Zimin" userId="7f2637d0bc515791" providerId="LiveId" clId="{5F359FD6-B8E9-41DA-90EC-0BA4FD0F3073}" dt="2026-09-23T17:48:41.935" v="34" actId="20577"/>
         <pc:sldMkLst>
           <pc:docMk/>
-          <pc:sldMk cId="9451513" sldId="466"/>
+          <pc:sldMk cId="591985588" sldId="509"/>
         </pc:sldMkLst>
+        <pc:spChg chg="mod">
+          <ac:chgData name="Aleksey Zimin" userId="7f2637d0bc515791" providerId="LiveId" clId="{5F359FD6-B8E9-41DA-90EC-0BA4FD0F3073}" dt="2026-09-23T17:48:41.935" v="34" actId="20577"/>
+          <ac:spMkLst>
+            <pc:docMk/>
+            <pc:sldMk cId="591985588" sldId="509"/>
+            <ac:spMk id="3" creationId="{188CD492-2FE1-A6AC-961C-BCBC64609890}"/>
+          </ac:spMkLst>
+        </pc:spChg>
       </pc:sldChg>
     </pc:docChg>
   </pc:docChgLst>
@@ -334,7 +381,7 @@
           <a:p>
             <a:fld id="{78C61B90-1233-4265-A8E1-4CB85DE126FB}" type="datetimeFigureOut">
               <a:rPr lang="en-US" smtClean="0"/>
-              <a:t>9/21/2026</a:t>
+              <a:t>9/23/2026</a:t>
             </a:fld>
             <a:endParaRPr lang="en-US"/>
           </a:p>
@@ -812,7 +859,7 @@
           <a:p>
             <a:fld id="{E2773EFF-6084-460D-96FA-2FA787A98816}" type="datetime1">
               <a:rPr lang="en-US" smtClean="0"/>
-              <a:t>9/21/2026</a:t>
+              <a:t>9/23/2026</a:t>
             </a:fld>
             <a:endParaRPr lang="en-US"/>
           </a:p>
@@ -1065,7 +1112,7 @@
           <a:p>
             <a:fld id="{013692F8-B2BD-4E07-9A92-E5080B238DFA}" type="datetime1">
               <a:rPr lang="en-US" smtClean="0"/>
-              <a:t>9/21/2026</a:t>
+              <a:t>9/23/2026</a:t>
             </a:fld>
             <a:endParaRPr lang="en-US"/>
           </a:p>
@@ -1234,7 +1281,7 @@
           <a:p>
             <a:fld id="{82A88673-6F42-4090-A040-176AF0E6DEAE}" type="datetime1">
               <a:rPr lang="en-US" smtClean="0"/>
-              <a:t>9/21/2026</a:t>
+              <a:t>9/23/2026</a:t>
             </a:fld>
             <a:endParaRPr lang="en-US"/>
           </a:p>
@@ -1413,7 +1460,7 @@
           <a:p>
             <a:fld id="{EC715288-B7FB-4510-97B0-C840A6671DDD}" type="datetime1">
               <a:rPr lang="en-US" smtClean="0"/>
-              <a:t>9/21/2026</a:t>
+              <a:t>9/23/2026</a:t>
             </a:fld>
             <a:endParaRPr lang="en-US"/>
           </a:p>
@@ -2074,7 +2121,7 @@
           <a:p>
             <a:fld id="{93FF86A1-0F17-41D8-9FFA-9520AF33BFC6}" type="datetime1">
               <a:rPr lang="en-US" smtClean="0"/>
-              <a:t>9/21/2026</a:t>
+              <a:t>9/23/2026</a:t>
             </a:fld>
             <a:endParaRPr lang="en-US"/>
           </a:p>
@@ -2309,7 +2356,7 @@
           <a:p>
             <a:fld id="{E41692F4-087A-4F4C-9829-F340F0646973}" type="datetime1">
               <a:rPr lang="en-US" smtClean="0"/>
-              <a:t>9/21/2026</a:t>
+              <a:t>9/23/2026</a:t>
             </a:fld>
             <a:endParaRPr lang="en-US"/>
           </a:p>
@@ -2555,7 +2602,7 @@
           <a:p>
             <a:fld id="{93E80BFE-E826-4B70-BF6B-3710B05194AF}" type="datetime1">
               <a:rPr lang="en-US" smtClean="0"/>
-              <a:t>9/21/2026</a:t>
+              <a:t>9/23/2026</a:t>
             </a:fld>
             <a:endParaRPr lang="en-US"/>
           </a:p>
@@ -2841,7 +2888,7 @@
           <a:p>
             <a:fld id="{9C5182DA-5425-42F9-BDB8-0DBDA15B981E}" type="datetime1">
               <a:rPr lang="en-US" smtClean="0"/>
-              <a:t>9/21/2026</a:t>
+              <a:t>9/23/2026</a:t>
             </a:fld>
             <a:endParaRPr lang="en-US"/>
           </a:p>
@@ -3340,7 +3387,7 @@
           <a:p>
             <a:fld id="{131B7164-C7F7-495E-9D5F-43BBDEBECF81}" type="datetime1">
               <a:rPr lang="en-US" smtClean="0"/>
-              <a:t>9/21/2026</a:t>
+              <a:t>9/23/2026</a:t>
             </a:fld>
             <a:endParaRPr lang="en-US"/>
           </a:p>
@@ -3458,7 +3505,7 @@
           <a:p>
             <a:fld id="{2D6C5AB8-78AA-4DA3-952F-F5057D2DAAA5}" type="datetime1">
               <a:rPr lang="en-US" smtClean="0"/>
-              <a:t>9/21/2026</a:t>
+              <a:t>9/23/2026</a:t>
             </a:fld>
             <a:endParaRPr lang="en-US"/>
           </a:p>
@@ -3554,7 +3601,7 @@
           <a:p>
             <a:fld id="{41CCB869-D2D8-4282-A525-D63712C1B900}" type="datetime1">
               <a:rPr lang="en-US" smtClean="0"/>
-              <a:t>9/21/2026</a:t>
+              <a:t>9/23/2026</a:t>
             </a:fld>
             <a:endParaRPr lang="en-US"/>
           </a:p>
@@ -3830,7 +3877,7 @@
           <a:p>
             <a:fld id="{25A8CF58-29B0-4D31-BE55-D9C1F05848B7}" type="datetime1">
               <a:rPr lang="en-US" smtClean="0"/>
-              <a:t>9/21/2026</a:t>
+              <a:t>9/23/2026</a:t>
             </a:fld>
             <a:endParaRPr lang="en-US"/>
           </a:p>
@@ -4051,7 +4098,7 @@
           <a:p>
             <a:fld id="{8F08395F-151A-4402-98B5-C84E535B9AEF}" type="datetime1">
               <a:rPr lang="en-US" smtClean="0"/>
-              <a:t>9/21/2026</a:t>
+              <a:t>9/23/2026</a:t>
             </a:fld>
             <a:endParaRPr lang="en-US"/>
           </a:p>
@@ -21751,7 +21798,7 @@
           <a:p>
             <a:r>
               <a:rPr lang="en-US" dirty="0"/>
-              <a:t>An overlap is an alignment between a pair of reads</a:t>
+              <a:t>An overlap is an pseudo-alignment between a pair of reads</a:t>
             </a:r>
           </a:p>
           <a:p>
@@ -24237,12 +24284,8 @@
           <a:lstStyle/>
           <a:p>
             <a:r>
-              <a:rPr lang="en-US" dirty="0" err="1"/>
-              <a:t>Souurces</a:t>
-            </a:r>
-            <a:r>
               <a:rPr lang="en-US" dirty="0"/>
-              <a:t>: </a:t>
+              <a:t>Sources: </a:t>
             </a:r>
             <a:r>
               <a:rPr lang="en-US" dirty="0">
@@ -24458,12 +24501,8 @@
           <a:lstStyle/>
           <a:p>
             <a:r>
-              <a:rPr lang="en-US" dirty="0" err="1"/>
-              <a:t>Souurces</a:t>
-            </a:r>
-            <a:r>
               <a:rPr lang="en-US" dirty="0"/>
-              <a:t>: </a:t>
+              <a:t>Sources: </a:t>
             </a:r>
             <a:r>
               <a:rPr lang="en-US" dirty="0">
@@ -24544,7 +24583,7 @@
             </a:pPr>
             <a:r>
               <a:rPr lang="en-US" sz="2400" dirty="0"/>
-              <a:t>Sequencing is discrete process most of the errors are substitutions, indels are rare (1/100)</a:t>
+              <a:t>Sequencing is discrete process; most of the errors are substitutions, indels are rare (1/100)</a:t>
             </a:r>
           </a:p>
           <a:p>

--- a/Fall 2026/Week 4 -- Genome Sequencing and Assembly Algorithms.pptx
+++ b/Fall 2026/Week 4 -- Genome Sequencing and Assembly Algorithms.pptx
@@ -381,7 +381,7 @@
           <a:p>
             <a:fld id="{78C61B90-1233-4265-A8E1-4CB85DE126FB}" type="datetimeFigureOut">
               <a:rPr lang="en-US" smtClean="0"/>
-              <a:t>9/23/2026</a:t>
+              <a:t>9/25/2026</a:t>
             </a:fld>
             <a:endParaRPr lang="en-US"/>
           </a:p>
@@ -859,7 +859,7 @@
           <a:p>
             <a:fld id="{E2773EFF-6084-460D-96FA-2FA787A98816}" type="datetime1">
               <a:rPr lang="en-US" smtClean="0"/>
-              <a:t>9/23/2026</a:t>
+              <a:t>9/25/2026</a:t>
             </a:fld>
             <a:endParaRPr lang="en-US"/>
           </a:p>
@@ -1112,7 +1112,7 @@
           <a:p>
             <a:fld id="{013692F8-B2BD-4E07-9A92-E5080B238DFA}" type="datetime1">
               <a:rPr lang="en-US" smtClean="0"/>
-              <a:t>9/23/2026</a:t>
+              <a:t>9/25/2026</a:t>
             </a:fld>
             <a:endParaRPr lang="en-US"/>
           </a:p>
@@ -1281,7 +1281,7 @@
           <a:p>
             <a:fld id="{82A88673-6F42-4090-A040-176AF0E6DEAE}" type="datetime1">
               <a:rPr lang="en-US" smtClean="0"/>
-              <a:t>9/23/2026</a:t>
+              <a:t>9/25/2026</a:t>
             </a:fld>
             <a:endParaRPr lang="en-US"/>
           </a:p>
@@ -1460,7 +1460,7 @@
           <a:p>
             <a:fld id="{EC715288-B7FB-4510-97B0-C840A6671DDD}" type="datetime1">
               <a:rPr lang="en-US" smtClean="0"/>
-              <a:t>9/23/2026</a:t>
+              <a:t>9/25/2026</a:t>
             </a:fld>
             <a:endParaRPr lang="en-US"/>
           </a:p>
@@ -2121,7 +2121,7 @@
           <a:p>
             <a:fld id="{93FF86A1-0F17-41D8-9FFA-9520AF33BFC6}" type="datetime1">
               <a:rPr lang="en-US" smtClean="0"/>
-              <a:t>9/23/2026</a:t>
+              <a:t>9/25/2026</a:t>
             </a:fld>
             <a:endParaRPr lang="en-US"/>
           </a:p>
@@ -2356,7 +2356,7 @@
           <a:p>
             <a:fld id="{E41692F4-087A-4F4C-9829-F340F0646973}" type="datetime1">
               <a:rPr lang="en-US" smtClean="0"/>
-              <a:t>9/23/2026</a:t>
+              <a:t>9/25/2026</a:t>
             </a:fld>
             <a:endParaRPr lang="en-US"/>
           </a:p>
@@ -2602,7 +2602,7 @@
           <a:p>
             <a:fld id="{93E80BFE-E826-4B70-BF6B-3710B05194AF}" type="datetime1">
               <a:rPr lang="en-US" smtClean="0"/>
-              <a:t>9/23/2026</a:t>
+              <a:t>9/25/2026</a:t>
             </a:fld>
             <a:endParaRPr lang="en-US"/>
           </a:p>
@@ -2888,7 +2888,7 @@
           <a:p>
             <a:fld id="{9C5182DA-5425-42F9-BDB8-0DBDA15B981E}" type="datetime1">
               <a:rPr lang="en-US" smtClean="0"/>
-              <a:t>9/23/2026</a:t>
+              <a:t>9/25/2026</a:t>
             </a:fld>
             <a:endParaRPr lang="en-US"/>
           </a:p>
@@ -3387,7 +3387,7 @@
           <a:p>
             <a:fld id="{131B7164-C7F7-495E-9D5F-43BBDEBECF81}" type="datetime1">
               <a:rPr lang="en-US" smtClean="0"/>
-              <a:t>9/23/2026</a:t>
+              <a:t>9/25/2026</a:t>
             </a:fld>
             <a:endParaRPr lang="en-US"/>
           </a:p>
@@ -3505,7 +3505,7 @@
           <a:p>
             <a:fld id="{2D6C5AB8-78AA-4DA3-952F-F5057D2DAAA5}" type="datetime1">
               <a:rPr lang="en-US" smtClean="0"/>
-              <a:t>9/23/2026</a:t>
+              <a:t>9/25/2026</a:t>
             </a:fld>
             <a:endParaRPr lang="en-US"/>
           </a:p>
@@ -3601,7 +3601,7 @@
           <a:p>
             <a:fld id="{41CCB869-D2D8-4282-A525-D63712C1B900}" type="datetime1">
               <a:rPr lang="en-US" smtClean="0"/>
-              <a:t>9/23/2026</a:t>
+              <a:t>9/25/2026</a:t>
             </a:fld>
             <a:endParaRPr lang="en-US"/>
           </a:p>
@@ -3877,7 +3877,7 @@
           <a:p>
             <a:fld id="{25A8CF58-29B0-4D31-BE55-D9C1F05848B7}" type="datetime1">
               <a:rPr lang="en-US" smtClean="0"/>
-              <a:t>9/23/2026</a:t>
+              <a:t>9/25/2026</a:t>
             </a:fld>
             <a:endParaRPr lang="en-US"/>
           </a:p>
@@ -4098,7 +4098,7 @@
           <a:p>
             <a:fld id="{8F08395F-151A-4402-98B5-C84E535B9AEF}" type="datetime1">
               <a:rPr lang="en-US" smtClean="0"/>
-              <a:t>9/23/2026</a:t>
+              <a:t>9/25/2026</a:t>
             </a:fld>
             <a:endParaRPr lang="en-US"/>
           </a:p>
@@ -5113,7 +5113,9 @@
         </p:nvSpPr>
         <p:spPr/>
         <p:txBody>
-          <a:bodyPr/>
+          <a:bodyPr>
+            <a:normAutofit lnSpcReduction="10000"/>
+          </a:bodyPr>
           <a:lstStyle/>
           <a:p>
             <a:r>
@@ -5152,7 +5154,29 @@
             <a:pPr lvl="1"/>
             <a:r>
               <a:rPr lang="en-US" dirty="0"/>
-              <a:t>Can correct of filter out reads with locally low K-mer counts</a:t>
+              <a:t>Can correct of filter out reads with locally low K-</a:t>
+            </a:r>
+            <a:r>
+              <a:rPr lang="en-US" dirty="0" err="1"/>
+              <a:t>mer</a:t>
+            </a:r>
+            <a:r>
+              <a:rPr lang="en-US" dirty="0"/>
+              <a:t> counts</a:t>
+            </a:r>
+          </a:p>
+          <a:p>
+            <a:r>
+              <a:rPr lang="en-US" dirty="0"/>
+              <a:t>But.. Not for Illumina reads – due to GC bias many low-count k-</a:t>
+            </a:r>
+            <a:r>
+              <a:rPr lang="en-US" dirty="0" err="1"/>
+              <a:t>mers</a:t>
+            </a:r>
+            <a:r>
+              <a:rPr lang="en-US" dirty="0"/>
+              <a:t> may be correct!</a:t>
             </a:r>
           </a:p>
         </p:txBody>
@@ -20617,15 +20641,15 @@
         </p:nvPicPr>
         <p:blipFill>
           <a:blip r:embed="rId3"/>
-          <a:srcRect b="81275"/>
+          <a:srcRect l="397" t="26" r="-397" b="49296"/>
           <a:stretch>
             <a:fillRect/>
           </a:stretch>
         </p:blipFill>
         <p:spPr>
           <a:xfrm>
-            <a:off x="6096000" y="1825141"/>
-            <a:ext cx="4758866" cy="956160"/>
+            <a:off x="5782223" y="1470772"/>
+            <a:ext cx="6044867" cy="3287151"/>
           </a:xfrm>
           <a:prstGeom prst="rect">
             <a:avLst/>
@@ -20646,7 +20670,7 @@
         </p:nvSpPr>
         <p:spPr>
           <a:xfrm>
-            <a:off x="5733090" y="3244334"/>
+            <a:off x="5838910" y="5598931"/>
             <a:ext cx="5838330" cy="369332"/>
           </a:xfrm>
           <a:prstGeom prst="rect">
